--- a/WATER_FLOOD_SYSTEM_BY_INNOVATORS.pptx
+++ b/WATER_FLOOD_SYSTEM_BY_INNOVATORS.pptx
@@ -11,8 +11,10 @@
     <p:sldId id="260" r:id="rId6"/>
     <p:sldId id="261" r:id="rId7"/>
     <p:sldId id="262" r:id="rId8"/>
-    <p:sldId id="264" r:id="rId9"/>
-    <p:sldId id="265" r:id="rId10"/>
+    <p:sldId id="267" r:id="rId9"/>
+    <p:sldId id="266" r:id="rId10"/>
+    <p:sldId id="264" r:id="rId11"/>
+    <p:sldId id="265" r:id="rId12"/>
   </p:sldIdLst>
   <p:sldSz cx="12192000" cy="6858000"/>
   <p:notesSz cx="6858000" cy="9144000"/>
@@ -114,7 +116,7 @@
   <p:extLst>
     <p:ext uri="{EFAFB233-063F-42B5-8137-9DF3F51BA10A}">
       <p15:sldGuideLst xmlns:p15="http://schemas.microsoft.com/office/powerpoint/2012/main">
-        <p15:guide id="1" orient="horz" pos="2166" userDrawn="1">
+        <p15:guide id="1" orient="horz" pos="2160" userDrawn="1">
           <p15:clr>
             <a:srgbClr val="A4A3A4"/>
           </p15:clr>
@@ -6042,6 +6044,10 @@
         <p:txBody>
           <a:bodyPr/>
           <a:p>
+            <a:r>
+              <a:rPr lang="en-US"/>
+              <a:t> </a:t>
+            </a:r>
             <a:endParaRPr lang="en-US"/>
           </a:p>
         </p:txBody>
@@ -6083,7 +6089,7 @@
         </p:blipFill>
         <p:spPr>
           <a:xfrm>
-            <a:off x="-635" y="0"/>
+            <a:off x="-107950" y="635"/>
             <a:ext cx="12192635" cy="6857365"/>
           </a:xfrm>
           <a:prstGeom prst="rect">
@@ -6107,7 +6113,7 @@
             <a:gdLst/>
             <a:ahLst/>
             <a:cxnLst>
-              <a:cxn ang="3cd4">
+              <a:cxn ang="3">
                 <a:pos x="hc" y="t"/>
               </a:cxn>
               <a:cxn ang="cd2">
@@ -7825,10 +7831,10 @@
   <p:clrMapOvr>
     <a:masterClrMapping/>
   </p:clrMapOvr>
-  <mc:AlternateContent xmlns:mc="http://schemas.openxmlformats.org/markup-compatibility/2006">
-    <mc:Choice xmlns:p14="http://schemas.microsoft.com/office/powerpoint/2010/main" Requires="p14">
-      <p:transition spd="slow" p14:dur="1200">
-        <p14:ripple/>
+  <mc:AlternateContent xmlns:mc="http://schemas.openxmlformats.org/markup-compatibility/2006" xmlns:p159="http://schemas.microsoft.com/office/powerpoint/2015/09/main">
+    <mc:Choice Requires="p159">
+      <p:transition xmlns:p14="http://schemas.microsoft.com/office/powerpoint/2010/main" spd="slow" p14:dur="2000">
+        <p159:morph option="byObject"/>
       </p:transition>
     </mc:Choice>
     <mc:Fallback>
@@ -9854,7 +9860,7 @@
             <a:gdLst/>
             <a:ahLst/>
             <a:cxnLst>
-              <a:cxn ang="3cd4">
+              <a:cxn ang="3">
                 <a:pos x="hc" y="t"/>
               </a:cxn>
               <a:cxn ang="cd2">
@@ -18335,7 +18341,7 @@
       </p:pic>
       <p:sp>
         <p:nvSpPr>
-          <p:cNvPr id="26" name="Top Corners Rounded Rectangle 25"/>
+          <p:cNvPr id="26" name="Rounded Rectangle 25"/>
           <p:cNvSpPr/>
           <p:nvPr/>
         </p:nvSpPr>
@@ -18344,7 +18350,7 @@
             <a:off x="609600" y="539115"/>
             <a:ext cx="5200650" cy="699135"/>
           </a:xfrm>
-          <a:prstGeom prst="round2SameRect">
+          <a:prstGeom prst="roundRect">
             <a:avLst/>
           </a:prstGeom>
           <a:solidFill>
@@ -18994,14 +19000,14 @@
   <p:clrMapOvr>
     <a:masterClrMapping/>
   </p:clrMapOvr>
-  <mc:AlternateContent xmlns:mc="http://schemas.openxmlformats.org/markup-compatibility/2006" xmlns:p159="http://schemas.microsoft.com/office/powerpoint/2015/09/main">
-    <mc:Choice Requires="p159">
-      <p:transition xmlns:p14="http://schemas.microsoft.com/office/powerpoint/2010/main" spd="slow" p14:dur="2000">
-        <p159:morph option="byObject"/>
+  <mc:AlternateContent xmlns:mc="http://schemas.openxmlformats.org/markup-compatibility/2006">
+    <mc:Choice xmlns:p14="http://schemas.microsoft.com/office/powerpoint/2010/main" Requires="p14">
+      <p:transition spd="med" p14:dur="699">
+        <p:fade/>
       </p:transition>
     </mc:Choice>
     <mc:Fallback>
-      <p:transition spd="slow">
+      <p:transition spd="med">
         <p:fade/>
       </p:transition>
     </mc:Fallback>
@@ -19035,7 +19041,7 @@
         </p:blipFill>
         <p:spPr>
           <a:xfrm>
-            <a:off x="-635" y="0"/>
+            <a:off x="0" y="-76200"/>
             <a:ext cx="12302490" cy="7522845"/>
           </a:xfrm>
           <a:prstGeom prst="rect">
@@ -19045,7 +19051,7 @@
       </p:pic>
       <p:sp>
         <p:nvSpPr>
-          <p:cNvPr id="44" name="Rectangle 43"/>
+          <p:cNvPr id="44" name="Rounded Rectangle 43"/>
           <p:cNvSpPr/>
           <p:nvPr/>
         </p:nvSpPr>
@@ -19054,7 +19060,7 @@
             <a:off x="8808720" y="2465070"/>
             <a:ext cx="2895600" cy="1447800"/>
           </a:xfrm>
-          <a:prstGeom prst="rect">
+          <a:prstGeom prst="roundRect">
             <a:avLst/>
           </a:prstGeom>
           <a:solidFill>
@@ -19087,7 +19093,7 @@
       </p:sp>
       <p:sp>
         <p:nvSpPr>
-          <p:cNvPr id="38" name="Rectangle 37"/>
+          <p:cNvPr id="38" name="Rounded Rectangle 37"/>
           <p:cNvSpPr/>
           <p:nvPr/>
         </p:nvSpPr>
@@ -19096,7 +19102,7 @@
             <a:off x="685800" y="4095115"/>
             <a:ext cx="2895600" cy="1447800"/>
           </a:xfrm>
-          <a:prstGeom prst="rect">
+          <a:prstGeom prst="roundRect">
             <a:avLst/>
           </a:prstGeom>
           <a:solidFill>
@@ -19129,7 +19135,7 @@
       </p:sp>
       <p:sp>
         <p:nvSpPr>
-          <p:cNvPr id="41" name="Rectangle 40"/>
+          <p:cNvPr id="41" name="Rounded Rectangle 40"/>
           <p:cNvSpPr/>
           <p:nvPr/>
         </p:nvSpPr>
@@ -19138,7 +19144,7 @@
             <a:off x="6035040" y="4095115"/>
             <a:ext cx="2895600" cy="1447800"/>
           </a:xfrm>
-          <a:prstGeom prst="rect">
+          <a:prstGeom prst="roundRect">
             <a:avLst/>
           </a:prstGeom>
           <a:solidFill>
@@ -19269,7 +19275,7 @@
       </p:sp>
       <p:sp>
         <p:nvSpPr>
-          <p:cNvPr id="40" name="Rectangle 39"/>
+          <p:cNvPr id="40" name="Rounded Rectangle 39"/>
           <p:cNvSpPr/>
           <p:nvPr/>
         </p:nvSpPr>
@@ -19278,7 +19284,7 @@
             <a:off x="3333750" y="2381885"/>
             <a:ext cx="2895600" cy="1447800"/>
           </a:xfrm>
-          <a:prstGeom prst="rect">
+          <a:prstGeom prst="roundRect">
             <a:avLst/>
           </a:prstGeom>
           <a:solidFill>
@@ -19362,7 +19368,7 @@
         </p:nvSpPr>
         <p:spPr>
           <a:xfrm>
-            <a:off x="3477037" y="2465337"/>
+            <a:off x="3477037" y="2495817"/>
             <a:ext cx="2464214" cy="266700"/>
           </a:xfrm>
           <a:prstGeom prst="rect">
@@ -19534,7 +19540,7 @@
         </p:nvSpPr>
         <p:spPr>
           <a:xfrm>
-            <a:off x="9024457" y="2465337"/>
+            <a:off x="8965402" y="2511057"/>
             <a:ext cx="2464214" cy="266700"/>
           </a:xfrm>
           <a:prstGeom prst="rect">
@@ -19671,7 +19677,7 @@
         </p:nvSpPr>
         <p:spPr>
           <a:xfrm>
-            <a:off x="4168140" y="568325"/>
+            <a:off x="4168140" y="539750"/>
             <a:ext cx="4095750" cy="552450"/>
           </a:xfrm>
           <a:prstGeom prst="rect">
@@ -19907,7 +19913,7 @@
         </p:nvSpPr>
         <p:spPr>
           <a:xfrm>
-            <a:off x="762000" y="1238250"/>
+            <a:off x="762000" y="1268730"/>
             <a:ext cx="10668000" cy="76200"/>
           </a:xfrm>
           <a:prstGeom prst="rect">
@@ -19969,6 +19975,1498 @@
 </file>
 
 <file path=ppt/slides/slide6.xml><?xml version="1.0" encoding="utf-8"?>
+<p:sld xmlns:a="http://schemas.openxmlformats.org/drawingml/2006/main" xmlns:r="http://schemas.openxmlformats.org/officeDocument/2006/relationships" xmlns:p="http://schemas.openxmlformats.org/presentationml/2006/main">
+  <p:cSld>
+    <p:spTree>
+      <p:nvGrpSpPr>
+        <p:cNvPr id="1" name=""/>
+        <p:cNvGrpSpPr/>
+        <p:nvPr/>
+      </p:nvGrpSpPr>
+      <p:grpSpPr/>
+      <p:pic>
+        <p:nvPicPr>
+          <p:cNvPr id="47" name="Picture 46" descr="Great_Wave_off_Kanagawa_-_reversed"/>
+          <p:cNvPicPr>
+            <a:picLocks noChangeAspect="1"/>
+          </p:cNvPicPr>
+          <p:nvPr/>
+        </p:nvPicPr>
+        <p:blipFill>
+          <a:blip r:embed="rId1"/>
+          <a:stretch>
+            <a:fillRect/>
+          </a:stretch>
+        </p:blipFill>
+        <p:spPr>
+          <a:xfrm>
+            <a:off x="0" y="-76200"/>
+            <a:ext cx="12302490" cy="7522845"/>
+          </a:xfrm>
+          <a:prstGeom prst="rect">
+            <a:avLst/>
+          </a:prstGeom>
+        </p:spPr>
+      </p:pic>
+      <p:sp>
+        <p:nvSpPr>
+          <p:cNvPr id="44" name="Rounded Rectangle 43"/>
+          <p:cNvSpPr/>
+          <p:nvPr/>
+        </p:nvSpPr>
+        <p:spPr>
+          <a:xfrm>
+            <a:off x="8808720" y="2465070"/>
+            <a:ext cx="2895600" cy="1447800"/>
+          </a:xfrm>
+          <a:prstGeom prst="roundRect">
+            <a:avLst/>
+          </a:prstGeom>
+          <a:solidFill>
+            <a:schemeClr val="tx1"/>
+          </a:solidFill>
+        </p:spPr>
+        <p:style>
+          <a:lnRef idx="2">
+            <a:schemeClr val="accent1">
+              <a:lumMod val="75000"/>
+            </a:schemeClr>
+          </a:lnRef>
+          <a:fillRef idx="1">
+            <a:schemeClr val="accent1"/>
+          </a:fillRef>
+          <a:effectRef idx="0">
+            <a:srgbClr val="FFFFFF"/>
+          </a:effectRef>
+          <a:fontRef idx="minor">
+            <a:schemeClr val="lt1"/>
+          </a:fontRef>
+        </p:style>
+        <p:txBody>
+          <a:bodyPr rtlCol="0" anchor="ctr"/>
+          <a:p>
+            <a:pPr algn="ctr"/>
+            <a:endParaRPr lang="en-US"/>
+          </a:p>
+        </p:txBody>
+      </p:sp>
+      <p:sp>
+        <p:nvSpPr>
+          <p:cNvPr id="38" name="Rounded Rectangle 37"/>
+          <p:cNvSpPr/>
+          <p:nvPr/>
+        </p:nvSpPr>
+        <p:spPr>
+          <a:xfrm>
+            <a:off x="685800" y="4095115"/>
+            <a:ext cx="2895600" cy="1447800"/>
+          </a:xfrm>
+          <a:prstGeom prst="roundRect">
+            <a:avLst/>
+          </a:prstGeom>
+          <a:solidFill>
+            <a:schemeClr val="tx1"/>
+          </a:solidFill>
+        </p:spPr>
+        <p:style>
+          <a:lnRef idx="2">
+            <a:schemeClr val="accent1">
+              <a:lumMod val="75000"/>
+            </a:schemeClr>
+          </a:lnRef>
+          <a:fillRef idx="1">
+            <a:schemeClr val="accent1"/>
+          </a:fillRef>
+          <a:effectRef idx="0">
+            <a:srgbClr val="FFFFFF"/>
+          </a:effectRef>
+          <a:fontRef idx="minor">
+            <a:schemeClr val="lt1"/>
+          </a:fontRef>
+        </p:style>
+        <p:txBody>
+          <a:bodyPr rtlCol="0" anchor="ctr"/>
+          <a:p>
+            <a:pPr algn="ctr"/>
+            <a:endParaRPr lang="en-US"/>
+          </a:p>
+        </p:txBody>
+      </p:sp>
+      <p:sp>
+        <p:nvSpPr>
+          <p:cNvPr id="41" name="Rounded Rectangle 40"/>
+          <p:cNvSpPr/>
+          <p:nvPr/>
+        </p:nvSpPr>
+        <p:spPr>
+          <a:xfrm>
+            <a:off x="6035040" y="4095115"/>
+            <a:ext cx="2895600" cy="1447800"/>
+          </a:xfrm>
+          <a:prstGeom prst="roundRect">
+            <a:avLst/>
+          </a:prstGeom>
+          <a:solidFill>
+            <a:schemeClr val="tx1"/>
+          </a:solidFill>
+        </p:spPr>
+        <p:style>
+          <a:lnRef idx="2">
+            <a:schemeClr val="accent1">
+              <a:lumMod val="75000"/>
+            </a:schemeClr>
+          </a:lnRef>
+          <a:fillRef idx="1">
+            <a:schemeClr val="accent1"/>
+          </a:fillRef>
+          <a:effectRef idx="0">
+            <a:srgbClr val="FFFFFF"/>
+          </a:effectRef>
+          <a:fontRef idx="minor">
+            <a:schemeClr val="lt1"/>
+          </a:fontRef>
+        </p:style>
+        <p:txBody>
+          <a:bodyPr rtlCol="0" anchor="ctr"/>
+          <a:p>
+            <a:pPr algn="ctr"/>
+            <a:endParaRPr lang="en-US"/>
+          </a:p>
+        </p:txBody>
+      </p:sp>
+      <p:sp>
+        <p:nvSpPr>
+          <p:cNvPr id="19" name="Rectangle 18"/>
+          <p:cNvSpPr/>
+          <p:nvPr/>
+        </p:nvSpPr>
+        <p:spPr>
+          <a:xfrm>
+            <a:off x="762000" y="3943350"/>
+            <a:ext cx="10668000" cy="38100"/>
+          </a:xfrm>
+          <a:prstGeom prst="rect">
+            <a:avLst/>
+          </a:prstGeom>
+          <a:solidFill>
+            <a:srgbClr val="060B04"/>
+          </a:solidFill>
+          <a:ln>
+            <a:noFill/>
+          </a:ln>
+          <a:effectLst/>
+        </p:spPr>
+        <p:style>
+          <a:lnRef idx="1">
+            <a:schemeClr val="accent1"/>
+          </a:lnRef>
+          <a:fillRef idx="3">
+            <a:schemeClr val="accent1"/>
+          </a:fillRef>
+          <a:effectRef idx="2">
+            <a:schemeClr val="accent1"/>
+          </a:effectRef>
+          <a:fontRef idx="minor">
+            <a:schemeClr val="lt1"/>
+          </a:fontRef>
+        </p:style>
+        <p:txBody>
+          <a:bodyPr rtlCol="0" anchor="ctr"/>
+          <a:lstStyle/>
+          <a:p>
+            <a:pPr algn="ctr"/>
+            <a:r>
+              <a:rPr lang="en-US">
+                <a:solidFill>
+                  <a:schemeClr val="tx1"/>
+                </a:solidFill>
+              </a:rPr>
+              <a:t>a</a:t>
+            </a:r>
+            <a:endParaRPr lang="en-US">
+              <a:solidFill>
+                <a:schemeClr val="tx1"/>
+              </a:solidFill>
+            </a:endParaRPr>
+          </a:p>
+        </p:txBody>
+      </p:sp>
+      <p:sp>
+        <p:nvSpPr>
+          <p:cNvPr id="20" name="TextBox 3"/>
+          <p:cNvSpPr txBox="1"/>
+          <p:nvPr/>
+        </p:nvSpPr>
+        <p:spPr>
+          <a:xfrm>
+            <a:off x="703328" y="4248150"/>
+            <a:ext cx="2464214" cy="266700"/>
+          </a:xfrm>
+          <a:prstGeom prst="rect">
+            <a:avLst/>
+          </a:prstGeom>
+          <a:noFill/>
+        </p:spPr>
+        <p:txBody>
+          <a:bodyPr wrap="square" lIns="0" tIns="0" rIns="0" bIns="0" anchor="t">
+            <a:spAutoFit/>
+          </a:bodyPr>
+          <a:lstStyle/>
+          <a:p>
+            <a:pPr algn="ctr"/>
+            <a:r>
+              <a:rPr sz="1650" b="0" i="0" u="none">
+                <a:solidFill>
+                  <a:schemeClr val="bg1"/>
+                </a:solidFill>
+                <a:latin typeface="Outfit SemiBold"/>
+              </a:rPr>
+              <a:t>1. Detect</a:t>
+            </a:r>
+            <a:endParaRPr sz="1650" b="0" i="0" u="none">
+              <a:solidFill>
+                <a:schemeClr val="bg1"/>
+              </a:solidFill>
+              <a:latin typeface="Outfit SemiBold"/>
+            </a:endParaRPr>
+          </a:p>
+        </p:txBody>
+      </p:sp>
+      <p:sp>
+        <p:nvSpPr>
+          <p:cNvPr id="40" name="Rounded Rectangle 39"/>
+          <p:cNvSpPr/>
+          <p:nvPr/>
+        </p:nvSpPr>
+        <p:spPr>
+          <a:xfrm>
+            <a:off x="3333750" y="2381885"/>
+            <a:ext cx="2895600" cy="1447800"/>
+          </a:xfrm>
+          <a:prstGeom prst="roundRect">
+            <a:avLst/>
+          </a:prstGeom>
+          <a:solidFill>
+            <a:schemeClr val="tx1"/>
+          </a:solidFill>
+        </p:spPr>
+        <p:style>
+          <a:lnRef idx="2">
+            <a:schemeClr val="accent1">
+              <a:lumMod val="75000"/>
+            </a:schemeClr>
+          </a:lnRef>
+          <a:fillRef idx="1">
+            <a:schemeClr val="accent1"/>
+          </a:fillRef>
+          <a:effectRef idx="0">
+            <a:srgbClr val="FFFFFF"/>
+          </a:effectRef>
+          <a:fontRef idx="minor">
+            <a:schemeClr val="lt1"/>
+          </a:fontRef>
+        </p:style>
+        <p:txBody>
+          <a:bodyPr rtlCol="0" anchor="ctr"/>
+          <a:p>
+            <a:pPr algn="ctr"/>
+            <a:endParaRPr lang="en-US"/>
+          </a:p>
+        </p:txBody>
+      </p:sp>
+      <p:sp>
+        <p:nvSpPr>
+          <p:cNvPr id="21" name="TextBox 4"/>
+          <p:cNvSpPr txBox="1"/>
+          <p:nvPr/>
+        </p:nvSpPr>
+        <p:spPr>
+          <a:xfrm>
+            <a:off x="762000" y="4667250"/>
+            <a:ext cx="2346870" cy="426541"/>
+          </a:xfrm>
+          <a:prstGeom prst="rect">
+            <a:avLst/>
+          </a:prstGeom>
+          <a:noFill/>
+        </p:spPr>
+        <p:txBody>
+          <a:bodyPr wrap="square" lIns="0" tIns="0" rIns="0" bIns="0" anchor="t">
+            <a:spAutoFit/>
+          </a:bodyPr>
+          <a:lstStyle/>
+          <a:p>
+            <a:pPr algn="ctr">
+              <a:lnSpc>
+                <a:spcPts val="1680"/>
+              </a:lnSpc>
+            </a:pPr>
+            <a:r>
+              <a:rPr sz="1200" b="0" i="0" u="none">
+                <a:solidFill>
+                  <a:schemeClr val="bg1"/>
+                </a:solidFill>
+                <a:latin typeface="Inter"/>
+              </a:rPr>
+              <a:t>Water level sensor traces make contact with rising flood waters.</a:t>
+            </a:r>
+            <a:endParaRPr sz="1200" b="0" i="0" u="none">
+              <a:solidFill>
+                <a:schemeClr val="bg1"/>
+              </a:solidFill>
+              <a:latin typeface="Inter"/>
+            </a:endParaRPr>
+          </a:p>
+        </p:txBody>
+      </p:sp>
+      <p:sp>
+        <p:nvSpPr>
+          <p:cNvPr id="22" name="TextBox 5"/>
+          <p:cNvSpPr txBox="1"/>
+          <p:nvPr/>
+        </p:nvSpPr>
+        <p:spPr>
+          <a:xfrm>
+            <a:off x="3477037" y="2495817"/>
+            <a:ext cx="2464214" cy="266700"/>
+          </a:xfrm>
+          <a:prstGeom prst="rect">
+            <a:avLst/>
+          </a:prstGeom>
+          <a:noFill/>
+        </p:spPr>
+        <p:txBody>
+          <a:bodyPr wrap="square" lIns="0" tIns="0" rIns="0" bIns="0" anchor="t">
+            <a:spAutoFit/>
+          </a:bodyPr>
+          <a:lstStyle/>
+          <a:p>
+            <a:pPr algn="ctr"/>
+            <a:r>
+              <a:rPr sz="1650" b="0" i="0" u="none">
+                <a:solidFill>
+                  <a:schemeClr val="bg1"/>
+                </a:solidFill>
+                <a:latin typeface="Outfit SemiBold"/>
+              </a:rPr>
+              <a:t>2. Analyze</a:t>
+            </a:r>
+            <a:endParaRPr sz="1650" b="0" i="0" u="none">
+              <a:solidFill>
+                <a:schemeClr val="bg1"/>
+              </a:solidFill>
+              <a:latin typeface="Outfit SemiBold"/>
+            </a:endParaRPr>
+          </a:p>
+        </p:txBody>
+      </p:sp>
+      <p:sp>
+        <p:nvSpPr>
+          <p:cNvPr id="23" name="TextBox 6"/>
+          <p:cNvSpPr txBox="1"/>
+          <p:nvPr/>
+        </p:nvSpPr>
+        <p:spPr>
+          <a:xfrm>
+            <a:off x="3535709" y="2884437"/>
+            <a:ext cx="2346870" cy="639812"/>
+          </a:xfrm>
+          <a:prstGeom prst="rect">
+            <a:avLst/>
+          </a:prstGeom>
+          <a:noFill/>
+        </p:spPr>
+        <p:txBody>
+          <a:bodyPr wrap="square" lIns="0" tIns="0" rIns="0" bIns="0" anchor="t">
+            <a:spAutoFit/>
+          </a:bodyPr>
+          <a:lstStyle/>
+          <a:p>
+            <a:pPr algn="ctr">
+              <a:lnSpc>
+                <a:spcPts val="1680"/>
+              </a:lnSpc>
+            </a:pPr>
+            <a:r>
+              <a:rPr sz="1200" b="0" i="0" u="none">
+                <a:solidFill>
+                  <a:schemeClr val="bg1"/>
+                </a:solidFill>
+                <a:latin typeface="Inter"/>
+              </a:rPr>
+              <a:t>Arduino continuously reads analog values to check if safe limits are breached.</a:t>
+            </a:r>
+            <a:endParaRPr sz="1200" b="0" i="0" u="none">
+              <a:solidFill>
+                <a:schemeClr val="bg1"/>
+              </a:solidFill>
+              <a:latin typeface="Inter"/>
+            </a:endParaRPr>
+          </a:p>
+        </p:txBody>
+      </p:sp>
+      <p:sp>
+        <p:nvSpPr>
+          <p:cNvPr id="24" name="TextBox 7"/>
+          <p:cNvSpPr txBox="1"/>
+          <p:nvPr/>
+        </p:nvSpPr>
+        <p:spPr>
+          <a:xfrm>
+            <a:off x="6250747" y="4248150"/>
+            <a:ext cx="2464214" cy="266700"/>
+          </a:xfrm>
+          <a:prstGeom prst="rect">
+            <a:avLst/>
+          </a:prstGeom>
+          <a:noFill/>
+        </p:spPr>
+        <p:txBody>
+          <a:bodyPr wrap="square" lIns="0" tIns="0" rIns="0" bIns="0" anchor="t">
+            <a:spAutoFit/>
+          </a:bodyPr>
+          <a:lstStyle/>
+          <a:p>
+            <a:pPr algn="ctr"/>
+            <a:r>
+              <a:rPr sz="1650" b="0" i="0" u="none">
+                <a:solidFill>
+                  <a:schemeClr val="bg1"/>
+                </a:solidFill>
+                <a:latin typeface="Outfit SemiBold"/>
+              </a:rPr>
+              <a:t>3. Alert</a:t>
+            </a:r>
+            <a:endParaRPr sz="1650" b="0" i="0" u="none">
+              <a:solidFill>
+                <a:schemeClr val="bg1"/>
+              </a:solidFill>
+              <a:latin typeface="Outfit SemiBold"/>
+            </a:endParaRPr>
+          </a:p>
+        </p:txBody>
+      </p:sp>
+      <p:sp>
+        <p:nvSpPr>
+          <p:cNvPr id="26" name="TextBox 8"/>
+          <p:cNvSpPr txBox="1"/>
+          <p:nvPr/>
+        </p:nvSpPr>
+        <p:spPr>
+          <a:xfrm>
+            <a:off x="6309419" y="4667250"/>
+            <a:ext cx="2346870" cy="639812"/>
+          </a:xfrm>
+          <a:prstGeom prst="rect">
+            <a:avLst/>
+          </a:prstGeom>
+          <a:noFill/>
+        </p:spPr>
+        <p:txBody>
+          <a:bodyPr wrap="square" lIns="0" tIns="0" rIns="0" bIns="0" anchor="t">
+            <a:spAutoFit/>
+          </a:bodyPr>
+          <a:lstStyle/>
+          <a:p>
+            <a:pPr algn="ctr">
+              <a:lnSpc>
+                <a:spcPts val="1680"/>
+              </a:lnSpc>
+            </a:pPr>
+            <a:r>
+              <a:rPr sz="1200" b="0" i="0" u="none">
+                <a:solidFill>
+                  <a:schemeClr val="bg1"/>
+                </a:solidFill>
+                <a:latin typeface="Inter"/>
+              </a:rPr>
+              <a:t>System triggers digital pin to sound the high-decibel buzzer siren.</a:t>
+            </a:r>
+            <a:endParaRPr sz="1200" b="0" i="0" u="none">
+              <a:solidFill>
+                <a:schemeClr val="bg1"/>
+              </a:solidFill>
+              <a:latin typeface="Inter"/>
+            </a:endParaRPr>
+          </a:p>
+        </p:txBody>
+      </p:sp>
+      <p:sp>
+        <p:nvSpPr>
+          <p:cNvPr id="27" name="TextBox 9"/>
+          <p:cNvSpPr txBox="1"/>
+          <p:nvPr/>
+        </p:nvSpPr>
+        <p:spPr>
+          <a:xfrm>
+            <a:off x="8965402" y="2511057"/>
+            <a:ext cx="2464214" cy="266700"/>
+          </a:xfrm>
+          <a:prstGeom prst="rect">
+            <a:avLst/>
+          </a:prstGeom>
+          <a:noFill/>
+        </p:spPr>
+        <p:txBody>
+          <a:bodyPr wrap="square" lIns="0" tIns="0" rIns="0" bIns="0" anchor="t">
+            <a:spAutoFit/>
+          </a:bodyPr>
+          <a:lstStyle/>
+          <a:p>
+            <a:pPr algn="ctr"/>
+            <a:r>
+              <a:rPr sz="1650" b="0" i="0" u="none">
+                <a:solidFill>
+                  <a:schemeClr val="bg1"/>
+                </a:solidFill>
+                <a:latin typeface="Outfit SemiBold"/>
+              </a:rPr>
+              <a:t>4. Actuate</a:t>
+            </a:r>
+            <a:endParaRPr sz="1650" b="0" i="0" u="none">
+              <a:solidFill>
+                <a:schemeClr val="bg1"/>
+              </a:solidFill>
+              <a:latin typeface="Outfit SemiBold"/>
+            </a:endParaRPr>
+          </a:p>
+        </p:txBody>
+      </p:sp>
+      <p:sp>
+        <p:nvSpPr>
+          <p:cNvPr id="28" name="TextBox 10"/>
+          <p:cNvSpPr txBox="1"/>
+          <p:nvPr/>
+        </p:nvSpPr>
+        <p:spPr>
+          <a:xfrm>
+            <a:off x="9083129" y="2884437"/>
+            <a:ext cx="2346870" cy="639812"/>
+          </a:xfrm>
+          <a:prstGeom prst="rect">
+            <a:avLst/>
+          </a:prstGeom>
+          <a:noFill/>
+        </p:spPr>
+        <p:txBody>
+          <a:bodyPr wrap="square" lIns="0" tIns="0" rIns="0" bIns="0" anchor="t">
+            <a:spAutoFit/>
+          </a:bodyPr>
+          <a:lstStyle/>
+          <a:p>
+            <a:pPr algn="ctr">
+              <a:lnSpc>
+                <a:spcPts val="1680"/>
+              </a:lnSpc>
+            </a:pPr>
+            <a:r>
+              <a:rPr sz="1200" b="0" i="0" u="none">
+                <a:solidFill>
+                  <a:schemeClr val="bg1"/>
+                </a:solidFill>
+                <a:latin typeface="Inter"/>
+              </a:rPr>
+              <a:t>Servo motor receives PWM signal and deploys the physical flood gate.</a:t>
+            </a:r>
+            <a:endParaRPr sz="1200" b="0" i="0" u="none">
+              <a:solidFill>
+                <a:schemeClr val="bg1"/>
+              </a:solidFill>
+              <a:latin typeface="Inter"/>
+            </a:endParaRPr>
+          </a:p>
+        </p:txBody>
+      </p:sp>
+      <p:sp>
+        <p:nvSpPr>
+          <p:cNvPr id="29" name="Rectangle 28"/>
+          <p:cNvSpPr/>
+          <p:nvPr/>
+        </p:nvSpPr>
+        <p:spPr>
+          <a:xfrm>
+            <a:off x="1840185" y="3867150"/>
+            <a:ext cx="190500" cy="190500"/>
+          </a:xfrm>
+          <a:prstGeom prst="rect">
+            <a:avLst/>
+          </a:prstGeom>
+          <a:solidFill>
+            <a:srgbClr val="FFFFFF"/>
+          </a:solidFill>
+          <a:ln w="38100">
+            <a:solidFill>
+              <a:srgbClr val="2563EB"/>
+            </a:solidFill>
+          </a:ln>
+          <a:effectLst/>
+        </p:spPr>
+        <p:style>
+          <a:lnRef idx="1">
+            <a:schemeClr val="accent1"/>
+          </a:lnRef>
+          <a:fillRef idx="3">
+            <a:schemeClr val="accent1"/>
+          </a:fillRef>
+          <a:effectRef idx="2">
+            <a:schemeClr val="accent1"/>
+          </a:effectRef>
+          <a:fontRef idx="minor">
+            <a:schemeClr val="lt1"/>
+          </a:fontRef>
+        </p:style>
+        <p:txBody>
+          <a:bodyPr rtlCol="0" anchor="ctr"/>
+          <a:lstStyle/>
+          <a:p>
+            <a:pPr algn="ctr"/>
+            <a:endParaRPr>
+              <a:solidFill>
+                <a:schemeClr val="bg1"/>
+              </a:solidFill>
+            </a:endParaRPr>
+          </a:p>
+        </p:txBody>
+      </p:sp>
+      <p:sp>
+        <p:nvSpPr>
+          <p:cNvPr id="37" name="Rectangle 36"/>
+          <p:cNvSpPr/>
+          <p:nvPr/>
+        </p:nvSpPr>
+        <p:spPr>
+          <a:xfrm>
+            <a:off x="4168140" y="539750"/>
+            <a:ext cx="4095750" cy="552450"/>
+          </a:xfrm>
+          <a:prstGeom prst="rect">
+            <a:avLst/>
+          </a:prstGeom>
+          <a:solidFill>
+            <a:schemeClr val="tx1"/>
+          </a:solidFill>
+        </p:spPr>
+        <p:style>
+          <a:lnRef idx="2">
+            <a:schemeClr val="accent1">
+              <a:lumMod val="75000"/>
+            </a:schemeClr>
+          </a:lnRef>
+          <a:fillRef idx="1">
+            <a:schemeClr val="accent1"/>
+          </a:fillRef>
+          <a:effectRef idx="0">
+            <a:srgbClr val="FFFFFF"/>
+          </a:effectRef>
+          <a:fontRef idx="minor">
+            <a:schemeClr val="lt1"/>
+          </a:fontRef>
+        </p:style>
+        <p:txBody>
+          <a:bodyPr rtlCol="0" anchor="ctr"/>
+          <a:p>
+            <a:pPr algn="ctr"/>
+            <a:endParaRPr lang="en-US"/>
+          </a:p>
+        </p:txBody>
+      </p:sp>
+      <p:sp>
+        <p:nvSpPr>
+          <p:cNvPr id="30" name="Rectangle 29"/>
+          <p:cNvSpPr/>
+          <p:nvPr/>
+        </p:nvSpPr>
+        <p:spPr>
+          <a:xfrm>
+            <a:off x="4613895" y="3867150"/>
+            <a:ext cx="190500" cy="190500"/>
+          </a:xfrm>
+          <a:prstGeom prst="rect">
+            <a:avLst/>
+          </a:prstGeom>
+          <a:solidFill>
+            <a:srgbClr val="FFFFFF"/>
+          </a:solidFill>
+          <a:ln w="38100">
+            <a:solidFill>
+              <a:srgbClr val="2563EB"/>
+            </a:solidFill>
+          </a:ln>
+          <a:effectLst/>
+        </p:spPr>
+        <p:style>
+          <a:lnRef idx="1">
+            <a:schemeClr val="accent1"/>
+          </a:lnRef>
+          <a:fillRef idx="3">
+            <a:schemeClr val="accent1"/>
+          </a:fillRef>
+          <a:effectRef idx="2">
+            <a:schemeClr val="accent1"/>
+          </a:effectRef>
+          <a:fontRef idx="minor">
+            <a:schemeClr val="lt1"/>
+          </a:fontRef>
+        </p:style>
+        <p:txBody>
+          <a:bodyPr rtlCol="0" anchor="ctr"/>
+          <a:lstStyle/>
+          <a:p>
+            <a:pPr algn="ctr"/>
+            <a:endParaRPr>
+              <a:solidFill>
+                <a:schemeClr val="bg1"/>
+              </a:solidFill>
+            </a:endParaRPr>
+          </a:p>
+        </p:txBody>
+      </p:sp>
+      <p:sp>
+        <p:nvSpPr>
+          <p:cNvPr id="31" name="Rectangle 30"/>
+          <p:cNvSpPr/>
+          <p:nvPr/>
+        </p:nvSpPr>
+        <p:spPr>
+          <a:xfrm>
+            <a:off x="7387604" y="3867150"/>
+            <a:ext cx="190500" cy="190500"/>
+          </a:xfrm>
+          <a:prstGeom prst="rect">
+            <a:avLst/>
+          </a:prstGeom>
+          <a:solidFill>
+            <a:srgbClr val="FFFFFF"/>
+          </a:solidFill>
+          <a:ln w="38100">
+            <a:solidFill>
+              <a:srgbClr val="2563EB"/>
+            </a:solidFill>
+          </a:ln>
+          <a:effectLst/>
+        </p:spPr>
+        <p:style>
+          <a:lnRef idx="1">
+            <a:schemeClr val="accent1"/>
+          </a:lnRef>
+          <a:fillRef idx="3">
+            <a:schemeClr val="accent1"/>
+          </a:fillRef>
+          <a:effectRef idx="2">
+            <a:schemeClr val="accent1"/>
+          </a:effectRef>
+          <a:fontRef idx="minor">
+            <a:schemeClr val="lt1"/>
+          </a:fontRef>
+        </p:style>
+        <p:txBody>
+          <a:bodyPr rtlCol="0" anchor="ctr"/>
+          <a:lstStyle/>
+          <a:p>
+            <a:pPr algn="ctr"/>
+            <a:endParaRPr>
+              <a:solidFill>
+                <a:schemeClr val="bg1"/>
+              </a:solidFill>
+            </a:endParaRPr>
+          </a:p>
+        </p:txBody>
+      </p:sp>
+      <p:sp>
+        <p:nvSpPr>
+          <p:cNvPr id="32" name="Rectangle 31"/>
+          <p:cNvSpPr/>
+          <p:nvPr/>
+        </p:nvSpPr>
+        <p:spPr>
+          <a:xfrm>
+            <a:off x="10161314" y="3867150"/>
+            <a:ext cx="190500" cy="190500"/>
+          </a:xfrm>
+          <a:prstGeom prst="rect">
+            <a:avLst/>
+          </a:prstGeom>
+          <a:solidFill>
+            <a:srgbClr val="FFFFFF"/>
+          </a:solidFill>
+          <a:ln w="38100">
+            <a:solidFill>
+              <a:srgbClr val="2563EB"/>
+            </a:solidFill>
+          </a:ln>
+          <a:effectLst/>
+        </p:spPr>
+        <p:style>
+          <a:lnRef idx="1">
+            <a:schemeClr val="accent1"/>
+          </a:lnRef>
+          <a:fillRef idx="3">
+            <a:schemeClr val="accent1"/>
+          </a:fillRef>
+          <a:effectRef idx="2">
+            <a:schemeClr val="accent1"/>
+          </a:effectRef>
+          <a:fontRef idx="minor">
+            <a:schemeClr val="lt1"/>
+          </a:fontRef>
+        </p:style>
+        <p:txBody>
+          <a:bodyPr rtlCol="0" anchor="ctr"/>
+          <a:lstStyle/>
+          <a:p>
+            <a:pPr algn="ctr"/>
+            <a:endParaRPr>
+              <a:solidFill>
+                <a:schemeClr val="bg1"/>
+              </a:solidFill>
+            </a:endParaRPr>
+          </a:p>
+        </p:txBody>
+      </p:sp>
+      <p:sp>
+        <p:nvSpPr>
+          <p:cNvPr id="33" name="TextBox 15"/>
+          <p:cNvSpPr txBox="1"/>
+          <p:nvPr/>
+        </p:nvSpPr>
+        <p:spPr>
+          <a:xfrm>
+            <a:off x="4358640" y="558800"/>
+            <a:ext cx="11201400" cy="542925"/>
+          </a:xfrm>
+          <a:prstGeom prst="rect">
+            <a:avLst/>
+          </a:prstGeom>
+          <a:noFill/>
+        </p:spPr>
+        <p:txBody>
+          <a:bodyPr wrap="square" lIns="0" tIns="0" rIns="0" bIns="0" anchor="t">
+            <a:spAutoFit/>
+          </a:bodyPr>
+          <a:lstStyle/>
+          <a:p>
+            <a:pPr algn="l"/>
+            <a:r>
+              <a:rPr sz="3300" b="1" i="0" u="none">
+                <a:solidFill>
+                  <a:schemeClr val="bg1"/>
+                </a:solidFill>
+                <a:latin typeface="Outfit"/>
+              </a:rPr>
+              <a:t>Operational Flow</a:t>
+            </a:r>
+            <a:endParaRPr sz="3300" b="1" i="0" u="none">
+              <a:solidFill>
+                <a:schemeClr val="bg1"/>
+              </a:solidFill>
+              <a:latin typeface="Outfit"/>
+            </a:endParaRPr>
+          </a:p>
+        </p:txBody>
+      </p:sp>
+      <p:sp>
+        <p:nvSpPr>
+          <p:cNvPr id="34" name="Rectangle 33"/>
+          <p:cNvSpPr/>
+          <p:nvPr/>
+        </p:nvSpPr>
+        <p:spPr>
+          <a:xfrm>
+            <a:off x="762000" y="1268730"/>
+            <a:ext cx="10668000" cy="76200"/>
+          </a:xfrm>
+          <a:prstGeom prst="rect">
+            <a:avLst/>
+          </a:prstGeom>
+          <a:solidFill>
+            <a:schemeClr val="tx1"/>
+          </a:solidFill>
+          <a:ln>
+            <a:noFill/>
+          </a:ln>
+          <a:effectLst/>
+        </p:spPr>
+        <p:style>
+          <a:lnRef idx="1">
+            <a:schemeClr val="accent1"/>
+          </a:lnRef>
+          <a:fillRef idx="3">
+            <a:schemeClr val="accent1"/>
+          </a:fillRef>
+          <a:effectRef idx="2">
+            <a:schemeClr val="accent1"/>
+          </a:effectRef>
+          <a:fontRef idx="minor">
+            <a:schemeClr val="lt1"/>
+          </a:fontRef>
+        </p:style>
+        <p:txBody>
+          <a:bodyPr rtlCol="0" anchor="ctr"/>
+          <a:lstStyle/>
+          <a:p>
+            <a:pPr algn="ctr"/>
+            <a:endParaRPr>
+              <a:solidFill>
+                <a:schemeClr val="bg1"/>
+              </a:solidFill>
+            </a:endParaRPr>
+          </a:p>
+        </p:txBody>
+      </p:sp>
+    </p:spTree>
+  </p:cSld>
+  <p:clrMapOvr>
+    <a:masterClrMapping/>
+  </p:clrMapOvr>
+  <mc:AlternateContent xmlns:mc="http://schemas.openxmlformats.org/markup-compatibility/2006" xmlns:p159="http://schemas.microsoft.com/office/powerpoint/2015/09/main">
+    <mc:Choice Requires="p159">
+      <p:transition xmlns:p14="http://schemas.microsoft.com/office/powerpoint/2010/main" spd="slow" p14:dur="2000">
+        <p159:morph option="byObject"/>
+      </p:transition>
+    </mc:Choice>
+    <mc:Fallback>
+      <p:transition spd="slow">
+        <p:fade/>
+      </p:transition>
+    </mc:Fallback>
+  </mc:AlternateContent>
+</p:sld>
+</file>
+
+<file path=ppt/slides/slide7.xml><?xml version="1.0" encoding="utf-8"?>
+<p:sld xmlns:a="http://schemas.openxmlformats.org/drawingml/2006/main" xmlns:r="http://schemas.openxmlformats.org/officeDocument/2006/relationships" xmlns:p="http://schemas.openxmlformats.org/presentationml/2006/main">
+  <p:cSld>
+    <p:spTree>
+      <p:nvGrpSpPr>
+        <p:cNvPr id="1" name=""/>
+        <p:cNvGrpSpPr/>
+        <p:nvPr/>
+      </p:nvGrpSpPr>
+      <p:grpSpPr/>
+      <p:pic>
+        <p:nvPicPr>
+          <p:cNvPr id="3" name="Picture 2" descr="Great_Wave_off_Kanagawa_-_reversed"/>
+          <p:cNvPicPr>
+            <a:picLocks noChangeAspect="1"/>
+          </p:cNvPicPr>
+          <p:nvPr/>
+        </p:nvPicPr>
+        <p:blipFill>
+          <a:blip r:embed="rId1"/>
+          <a:stretch>
+            <a:fillRect/>
+          </a:stretch>
+        </p:blipFill>
+        <p:spPr>
+          <a:xfrm>
+            <a:off x="0" y="-233045"/>
+            <a:ext cx="12302490" cy="7522845"/>
+          </a:xfrm>
+          <a:prstGeom prst="rect">
+            <a:avLst/>
+          </a:prstGeom>
+        </p:spPr>
+      </p:pic>
+      <p:sp>
+        <p:nvSpPr>
+          <p:cNvPr id="24" name="Rounded Rectangle 23"/>
+          <p:cNvSpPr/>
+          <p:nvPr/>
+        </p:nvSpPr>
+        <p:spPr>
+          <a:xfrm>
+            <a:off x="221615" y="293370"/>
+            <a:ext cx="4385945" cy="552450"/>
+          </a:xfrm>
+          <a:prstGeom prst="roundRect">
+            <a:avLst/>
+          </a:prstGeom>
+          <a:solidFill>
+            <a:schemeClr val="tx1"/>
+          </a:solidFill>
+        </p:spPr>
+        <p:style>
+          <a:lnRef idx="2">
+            <a:schemeClr val="accent1">
+              <a:lumMod val="75000"/>
+            </a:schemeClr>
+          </a:lnRef>
+          <a:fillRef idx="1">
+            <a:schemeClr val="accent1"/>
+          </a:fillRef>
+          <a:effectRef idx="0">
+            <a:srgbClr val="FFFFFF"/>
+          </a:effectRef>
+          <a:fontRef idx="minor">
+            <a:schemeClr val="lt1"/>
+          </a:fontRef>
+        </p:style>
+        <p:txBody>
+          <a:bodyPr rtlCol="0" anchor="ctr"/>
+          <a:p>
+            <a:pPr algn="ctr"/>
+            <a:endParaRPr lang="en-US"/>
+          </a:p>
+        </p:txBody>
+      </p:sp>
+      <p:sp>
+        <p:nvSpPr>
+          <p:cNvPr id="23" name="Text Box 22"/>
+          <p:cNvSpPr txBox="1"/>
+          <p:nvPr/>
+        </p:nvSpPr>
+        <p:spPr>
+          <a:xfrm>
+            <a:off x="221615" y="347980"/>
+            <a:ext cx="4515485" cy="543560"/>
+          </a:xfrm>
+          <a:prstGeom prst="rect">
+            <a:avLst/>
+          </a:prstGeom>
+        </p:spPr>
+        <p:txBody>
+          <a:bodyPr>
+            <a:noAutofit/>
+          </a:bodyPr>
+          <a:p>
+            <a:pPr marL="0" indent="0" algn="l">
+              <a:spcBef>
+                <a:spcPct val="0"/>
+              </a:spcBef>
+              <a:spcAft>
+                <a:spcPts val="3000"/>
+              </a:spcAft>
+            </a:pPr>
+            <a:r>
+              <a:rPr sz="3000" b="1" u="sng">
+                <a:solidFill>
+                  <a:schemeClr val="bg1"/>
+                </a:solidFill>
+                <a:latin typeface="Arial Black" panose="020B0A04020102020204" charset="0"/>
+                <a:ea typeface="Plus Jakarta Sans"/>
+                <a:cs typeface="Arial Black" panose="020B0A04020102020204" charset="0"/>
+              </a:rPr>
+              <a:t>The </a:t>
+            </a:r>
+            <a:r>
+              <a:rPr sz="3000" b="1" u="sng">
+                <a:solidFill>
+                  <a:schemeClr val="accent6">
+                    <a:lumMod val="75000"/>
+                  </a:schemeClr>
+                </a:solidFill>
+                <a:latin typeface="Arial Black" panose="020B0A04020102020204" charset="0"/>
+                <a:ea typeface="Plus Jakarta Sans"/>
+                <a:cs typeface="Arial Black" panose="020B0A04020102020204" charset="0"/>
+              </a:rPr>
+              <a:t>Cost </a:t>
+            </a:r>
+            <a:r>
+              <a:rPr sz="3000" b="1" u="sng">
+                <a:solidFill>
+                  <a:schemeClr val="bg1"/>
+                </a:solidFill>
+                <a:latin typeface="Arial Black" panose="020B0A04020102020204" charset="0"/>
+                <a:ea typeface="Plus Jakarta Sans"/>
+                <a:cs typeface="Arial Black" panose="020B0A04020102020204" charset="0"/>
+              </a:rPr>
+              <a:t>of Inaction</a:t>
+            </a:r>
+            <a:endParaRPr sz="3000" b="1" u="sng">
+              <a:solidFill>
+                <a:schemeClr val="bg1"/>
+              </a:solidFill>
+              <a:latin typeface="Arial Black" panose="020B0A04020102020204" charset="0"/>
+              <a:ea typeface="Plus Jakarta Sans"/>
+              <a:cs typeface="Arial Black" panose="020B0A04020102020204" charset="0"/>
+            </a:endParaRPr>
+          </a:p>
+        </p:txBody>
+      </p:sp>
+      <p:sp>
+        <p:nvSpPr>
+          <p:cNvPr id="27" name="Rounded Rectangle 26"/>
+          <p:cNvSpPr/>
+          <p:nvPr/>
+        </p:nvSpPr>
+        <p:spPr>
+          <a:xfrm>
+            <a:off x="3958590" y="1589405"/>
+            <a:ext cx="4521200" cy="1678940"/>
+          </a:xfrm>
+          <a:prstGeom prst="roundRect">
+            <a:avLst/>
+          </a:prstGeom>
+          <a:solidFill>
+            <a:schemeClr val="tx1"/>
+          </a:solidFill>
+          <a:ln>
+            <a:noFill/>
+          </a:ln>
+        </p:spPr>
+        <p:style>
+          <a:lnRef idx="2">
+            <a:schemeClr val="accent1">
+              <a:lumMod val="75000"/>
+            </a:schemeClr>
+          </a:lnRef>
+          <a:fillRef idx="1">
+            <a:schemeClr val="accent1"/>
+          </a:fillRef>
+          <a:effectRef idx="0">
+            <a:srgbClr val="FFFFFF"/>
+          </a:effectRef>
+          <a:fontRef idx="minor">
+            <a:schemeClr val="lt1"/>
+          </a:fontRef>
+        </p:style>
+        <p:txBody>
+          <a:bodyPr rtlCol="0" anchor="ctr"/>
+          <a:p>
+            <a:pPr algn="ctr"/>
+            <a:endParaRPr lang="en-US"/>
+          </a:p>
+        </p:txBody>
+      </p:sp>
+      <p:sp>
+        <p:nvSpPr>
+          <p:cNvPr id="25" name="Text Box 24"/>
+          <p:cNvSpPr txBox="1"/>
+          <p:nvPr/>
+        </p:nvSpPr>
+        <p:spPr>
+          <a:xfrm>
+            <a:off x="3625850" y="1415415"/>
+            <a:ext cx="5011420" cy="1716405"/>
+          </a:xfrm>
+          <a:prstGeom prst="rect">
+            <a:avLst/>
+          </a:prstGeom>
+        </p:spPr>
+        <p:txBody>
+          <a:bodyPr>
+            <a:noAutofit/>
+          </a:bodyPr>
+          <a:p>
+            <a:pPr marL="0" indent="0" algn="ctr">
+              <a:spcAft>
+                <a:spcPts val="700"/>
+              </a:spcAft>
+            </a:pPr>
+            <a:r>
+              <a:rPr sz="7800" b="1" i="0">
+                <a:solidFill>
+                  <a:srgbClr val="FF0000"/>
+                </a:solidFill>
+                <a:latin typeface="Plus Jakarta Sans"/>
+                <a:ea typeface="Plus Jakarta Sans"/>
+              </a:rPr>
+              <a:t>389</a:t>
+            </a:r>
+            <a:endParaRPr sz="7800" b="1" i="0">
+              <a:solidFill>
+                <a:srgbClr val="FF0000"/>
+              </a:solidFill>
+              <a:latin typeface="Plus Jakarta Sans"/>
+              <a:ea typeface="Plus Jakarta Sans"/>
+            </a:endParaRPr>
+          </a:p>
+          <a:p>
+            <a:pPr marL="0" indent="0" algn="ctr"/>
+            <a:r>
+              <a:rPr sz="1600" b="0" i="0">
+                <a:solidFill>
+                  <a:schemeClr val="bg1"/>
+                </a:solidFill>
+                <a:latin typeface="Inter"/>
+                <a:ea typeface="Inter"/>
+              </a:rPr>
+              <a:t>Confirmed</a:t>
+            </a:r>
+            <a:r>
+              <a:rPr sz="1600" b="0" i="0">
+                <a:solidFill>
+                  <a:srgbClr val="1E293B"/>
+                </a:solidFill>
+                <a:latin typeface="Inter"/>
+                <a:ea typeface="Inter"/>
+              </a:rPr>
+              <a:t> </a:t>
+            </a:r>
+            <a:r>
+              <a:rPr sz="1600" b="0" i="0">
+                <a:solidFill>
+                  <a:srgbClr val="FF0000"/>
+                </a:solidFill>
+                <a:latin typeface="Inter"/>
+                <a:ea typeface="Inter"/>
+              </a:rPr>
+              <a:t>Casualties</a:t>
+            </a:r>
+            <a:r>
+              <a:rPr sz="1600" b="0" i="0">
+                <a:solidFill>
+                  <a:srgbClr val="1E293B"/>
+                </a:solidFill>
+                <a:latin typeface="Inter"/>
+                <a:ea typeface="Inter"/>
+              </a:rPr>
+              <a:t> </a:t>
+            </a:r>
+            <a:r>
+              <a:rPr sz="1600" b="0" i="0">
+                <a:solidFill>
+                  <a:schemeClr val="bg1"/>
+                </a:solidFill>
+                <a:latin typeface="Inter"/>
+                <a:ea typeface="Inter"/>
+              </a:rPr>
+              <a:t>in Region</a:t>
+            </a:r>
+            <a:endParaRPr sz="1600" b="0" i="0">
+              <a:solidFill>
+                <a:schemeClr val="bg1"/>
+              </a:solidFill>
+              <a:latin typeface="Inter"/>
+              <a:ea typeface="Inter"/>
+            </a:endParaRPr>
+          </a:p>
+        </p:txBody>
+      </p:sp>
+      <p:sp>
+        <p:nvSpPr>
+          <p:cNvPr id="28" name="Rounded Rectangle 27"/>
+          <p:cNvSpPr/>
+          <p:nvPr/>
+        </p:nvSpPr>
+        <p:spPr>
+          <a:xfrm>
+            <a:off x="1657350" y="3775710"/>
+            <a:ext cx="8596630" cy="2418715"/>
+          </a:xfrm>
+          <a:prstGeom prst="roundRect">
+            <a:avLst/>
+          </a:prstGeom>
+          <a:solidFill>
+            <a:schemeClr val="tx1"/>
+          </a:solidFill>
+        </p:spPr>
+        <p:style>
+          <a:lnRef idx="2">
+            <a:schemeClr val="accent1">
+              <a:lumMod val="75000"/>
+            </a:schemeClr>
+          </a:lnRef>
+          <a:fillRef idx="1">
+            <a:schemeClr val="accent1"/>
+          </a:fillRef>
+          <a:effectRef idx="0">
+            <a:srgbClr val="FFFFFF"/>
+          </a:effectRef>
+          <a:fontRef idx="minor">
+            <a:schemeClr val="lt1"/>
+          </a:fontRef>
+        </p:style>
+        <p:txBody>
+          <a:bodyPr rtlCol="0" anchor="ctr"/>
+          <a:p>
+            <a:pPr algn="ctr"/>
+            <a:endParaRPr lang="en-US"/>
+          </a:p>
+        </p:txBody>
+      </p:sp>
+      <p:sp>
+        <p:nvSpPr>
+          <p:cNvPr id="33" name="Text Box 32"/>
+          <p:cNvSpPr txBox="1"/>
+          <p:nvPr/>
+        </p:nvSpPr>
+        <p:spPr>
+          <a:xfrm>
+            <a:off x="1943735" y="3775710"/>
+            <a:ext cx="8122285" cy="2179320"/>
+          </a:xfrm>
+          <a:prstGeom prst="rect">
+            <a:avLst/>
+          </a:prstGeom>
+        </p:spPr>
+        <p:txBody>
+          <a:bodyPr>
+            <a:noAutofit/>
+          </a:bodyPr>
+          <a:p>
+            <a:pPr marL="0" indent="0">
+              <a:spcBef>
+                <a:spcPct val="0"/>
+              </a:spcBef>
+              <a:spcAft>
+                <a:spcPts val="1100"/>
+              </a:spcAft>
+            </a:pPr>
+            <a:r>
+              <a:rPr lang="en-US" sz="2200" b="1" i="0">
+                <a:solidFill>
+                  <a:schemeClr val="bg1"/>
+                </a:solidFill>
+                <a:latin typeface="Plus Jakarta Sans"/>
+                <a:ea typeface="Plus Jakarta Sans"/>
+              </a:rPr>
+              <a:t>             	    </a:t>
+            </a:r>
+            <a:r>
+              <a:rPr sz="2200" b="1" i="0">
+                <a:solidFill>
+                  <a:schemeClr val="accent6">
+                    <a:lumMod val="20000"/>
+                    <a:lumOff val="80000"/>
+                  </a:schemeClr>
+                </a:solidFill>
+                <a:latin typeface="Arial Black" panose="020B0A04020102020204" charset="0"/>
+                <a:ea typeface="Plus Jakarta Sans"/>
+                <a:cs typeface="Arial Black" panose="020B0A04020102020204" charset="0"/>
+              </a:rPr>
+              <a:t>Why Automation Matters</a:t>
+            </a:r>
+            <a:r>
+              <a:rPr lang="en-US" sz="2200" b="1" i="0">
+                <a:solidFill>
+                  <a:schemeClr val="accent6">
+                    <a:lumMod val="20000"/>
+                    <a:lumOff val="80000"/>
+                  </a:schemeClr>
+                </a:solidFill>
+                <a:latin typeface="Plus Jakarta Sans"/>
+                <a:ea typeface="Plus Jakarta Sans"/>
+              </a:rPr>
+              <a:t> </a:t>
+            </a:r>
+            <a:endParaRPr sz="2200" b="1" i="0">
+              <a:solidFill>
+                <a:schemeClr val="bg1"/>
+              </a:solidFill>
+              <a:latin typeface="Plus Jakarta Sans"/>
+              <a:ea typeface="Plus Jakarta Sans"/>
+            </a:endParaRPr>
+          </a:p>
+          <a:p>
+            <a:pPr marL="0" indent="457200" algn="ctr">
+              <a:spcBef>
+                <a:spcPct val="0"/>
+              </a:spcBef>
+              <a:spcAft>
+                <a:spcPct val="0"/>
+              </a:spcAft>
+            </a:pPr>
+            <a:r>
+              <a:rPr sz="2000" b="0" i="0">
+                <a:solidFill>
+                  <a:schemeClr val="accent6">
+                    <a:lumMod val="20000"/>
+                    <a:lumOff val="80000"/>
+                  </a:schemeClr>
+                </a:solidFill>
+                <a:latin typeface="Inter"/>
+                <a:ea typeface="Inter"/>
+              </a:rPr>
+              <a:t>Thousands remain vulnerable across border regions to delayed manual warnings. Implementing </a:t>
+            </a:r>
+            <a:r>
+              <a:rPr lang="en-US" sz="2000" b="0" i="0">
+                <a:solidFill>
+                  <a:schemeClr val="accent6">
+                    <a:lumMod val="20000"/>
+                    <a:lumOff val="80000"/>
+                  </a:schemeClr>
+                </a:solidFill>
+                <a:latin typeface="Inter"/>
+                <a:ea typeface="Inter"/>
+              </a:rPr>
+              <a:t>  </a:t>
+            </a:r>
+            <a:r>
+              <a:rPr sz="2000" b="0" i="0">
+                <a:solidFill>
+                  <a:schemeClr val="accent6">
+                    <a:lumMod val="20000"/>
+                    <a:lumOff val="80000"/>
+                  </a:schemeClr>
+                </a:solidFill>
+                <a:latin typeface="Inter"/>
+                <a:ea typeface="Inter"/>
+              </a:rPr>
+              <a:t>micro-automated bridges the critical gap between detection and disaster response.</a:t>
+            </a:r>
+            <a:endParaRPr sz="2000" b="0" i="0">
+              <a:solidFill>
+                <a:schemeClr val="accent6">
+                  <a:lumMod val="20000"/>
+                  <a:lumOff val="80000"/>
+                </a:schemeClr>
+              </a:solidFill>
+              <a:latin typeface="Inter"/>
+              <a:ea typeface="Inter"/>
+            </a:endParaRPr>
+          </a:p>
+        </p:txBody>
+      </p:sp>
+      <p:sp>
+        <p:nvSpPr>
+          <p:cNvPr id="39" name="Text Box 38"/>
+          <p:cNvSpPr txBox="1"/>
+          <p:nvPr/>
+        </p:nvSpPr>
+        <p:spPr>
+          <a:xfrm>
+            <a:off x="5856605" y="2982595"/>
+            <a:ext cx="549910" cy="222250"/>
+          </a:xfrm>
+          <a:prstGeom prst="rect">
+            <a:avLst/>
+          </a:prstGeom>
+          <a:noFill/>
+        </p:spPr>
+        <p:txBody>
+          <a:bodyPr wrap="square" rtlCol="0">
+            <a:noAutofit/>
+          </a:bodyPr>
+          <a:p>
+            <a:r>
+              <a:rPr lang="en-US" sz="1000">
+                <a:solidFill>
+                  <a:schemeClr val="bg1"/>
+                </a:solidFill>
+              </a:rPr>
+              <a:t>RIP</a:t>
+            </a:r>
+            <a:endParaRPr lang="en-US" sz="1000">
+              <a:solidFill>
+                <a:schemeClr val="bg1"/>
+              </a:solidFill>
+            </a:endParaRPr>
+          </a:p>
+        </p:txBody>
+      </p:sp>
+    </p:spTree>
+  </p:cSld>
+  <p:clrMapOvr>
+    <a:masterClrMapping/>
+  </p:clrMapOvr>
+  <mc:AlternateContent xmlns:mc="http://schemas.openxmlformats.org/markup-compatibility/2006" xmlns:p159="http://schemas.microsoft.com/office/powerpoint/2015/09/main">
+    <mc:Choice Requires="p159">
+      <p:transition xmlns:p14="http://schemas.microsoft.com/office/powerpoint/2010/main" spd="slow" p14:dur="2000">
+        <p159:morph option="byObject"/>
+      </p:transition>
+    </mc:Choice>
+    <mc:Fallback>
+      <p:transition spd="slow">
+        <p:fade/>
+      </p:transition>
+    </mc:Fallback>
+  </mc:AlternateContent>
+</p:sld>
+</file>
+
+<file path=ppt/slides/slide8.xml><?xml version="1.0" encoding="utf-8"?>
 <p:sld xmlns:a="http://schemas.openxmlformats.org/drawingml/2006/main" xmlns:r="http://schemas.openxmlformats.org/officeDocument/2006/relationships" xmlns:p="http://schemas.openxmlformats.org/presentationml/2006/main">
   <p:cSld>
     <p:spTree>
@@ -20074,7 +21572,10 @@
             <a:r>
               <a:rPr sz="3600" b="0" i="0" u="none">
                 <a:solidFill>
-                  <a:schemeClr val="bg1"/>
+                  <a:schemeClr val="accent1">
+                    <a:lumMod val="40000"/>
+                    <a:lumOff val="60000"/>
+                  </a:schemeClr>
                 </a:solidFill>
                 <a:latin typeface="Outfit Medium"/>
               </a:rPr>
@@ -20082,7 +21583,10 @@
             </a:r>
             <a:endParaRPr sz="3600" b="0" i="0" u="none">
               <a:solidFill>
-                <a:schemeClr val="bg1"/>
+                <a:schemeClr val="accent1">
+                  <a:lumMod val="40000"/>
+                  <a:lumOff val="60000"/>
+                </a:schemeClr>
               </a:solidFill>
               <a:latin typeface="Outfit Medium"/>
             </a:endParaRPr>
@@ -20333,9 +21837,17 @@
                   <a:schemeClr val="bg1"/>
                 </a:solidFill>
               </a:rPr>
-              <a:t>- BY INNOVATORS</a:t>
+              <a:t>- BY </a:t>
             </a:r>
-            <a:endParaRPr lang="en-US" sz="2500">
+            <a:r>
+              <a:rPr lang="en-US" sz="2500" b="1">
+                <a:solidFill>
+                  <a:schemeClr val="bg1"/>
+                </a:solidFill>
+              </a:rPr>
+              <a:t>INNOVATORS</a:t>
+            </a:r>
+            <a:endParaRPr lang="en-US" sz="2500" b="1">
               <a:solidFill>
                 <a:schemeClr val="bg1"/>
               </a:solidFill>
@@ -20343,14 +21855,14 @@
           </a:p>
           <a:p>
             <a:r>
-              <a:rPr lang="en-US" sz="2500">
+              <a:rPr lang="en-US" sz="2500" b="1">
                 <a:solidFill>
                   <a:schemeClr val="bg1"/>
                 </a:solidFill>
               </a:rPr>
-              <a:t>         TEAM</a:t>
+              <a:t>            TEAM</a:t>
             </a:r>
-            <a:endParaRPr lang="en-US" sz="2500">
+            <a:endParaRPr lang="en-US" sz="2500" b="1">
               <a:solidFill>
                 <a:schemeClr val="bg1"/>
               </a:solidFill>
@@ -20378,7 +21890,7 @@
 </p:sld>
 </file>
 
-<file path=ppt/slides/slide7.xml><?xml version="1.0" encoding="utf-8"?>
+<file path=ppt/slides/slide9.xml><?xml version="1.0" encoding="utf-8"?>
 <p:sld xmlns:a="http://schemas.openxmlformats.org/drawingml/2006/main" xmlns:r="http://schemas.openxmlformats.org/officeDocument/2006/relationships" xmlns:p="http://schemas.openxmlformats.org/presentationml/2006/main">
   <p:cSld>
     <p:spTree>
@@ -20420,15 +21932,15 @@
         </p:nvSpPr>
         <p:spPr>
           <a:xfrm>
-            <a:off x="1572260" y="1920240"/>
-            <a:ext cx="8596630" cy="3409950"/>
+            <a:off x="1211580" y="1184910"/>
+            <a:ext cx="9878060" cy="4693285"/>
           </a:xfrm>
           <a:custGeom>
             <a:avLst/>
             <a:gdLst/>
             <a:ahLst/>
             <a:cxnLst>
-              <a:cxn ang="3cd4">
+              <a:cxn ang="3">
                 <a:pos x="hc" y="t"/>
               </a:cxn>
               <a:cxn ang="cd2">
@@ -23926,6 +25438,18 @@
   <p:clrMapOvr>
     <a:masterClrMapping/>
   </p:clrMapOvr>
+  <mc:AlternateContent xmlns:mc="http://schemas.openxmlformats.org/markup-compatibility/2006">
+    <mc:Choice xmlns:p14="http://schemas.microsoft.com/office/powerpoint/2010/main" Requires="p14">
+      <p:transition spd="med" p14:dur="699">
+        <p:fade/>
+      </p:transition>
+    </mc:Choice>
+    <mc:Fallback>
+      <p:transition spd="med">
+        <p:fade/>
+      </p:transition>
+    </mc:Fallback>
+  </mc:AlternateContent>
 </p:sld>
 </file>
 

--- a/WATER_FLOOD_SYSTEM_BY_INNOVATORS.pptx
+++ b/WATER_FLOOD_SYSTEM_BY_INNOVATORS.pptx
@@ -21154,14 +21154,14 @@
               </a:spcAft>
             </a:pPr>
             <a:r>
-              <a:rPr sz="7800" b="1" i="0">
+              <a:rPr lang="en-US" sz="7800" b="1" i="0">
                 <a:solidFill>
                   <a:srgbClr val="FF0000"/>
                 </a:solidFill>
                 <a:latin typeface="Plus Jakarta Sans"/>
                 <a:ea typeface="Plus Jakarta Sans"/>
               </a:rPr>
-              <a:t>389</a:t>
+              <a:t>804</a:t>
             </a:r>
             <a:endParaRPr sz="7800" b="1" i="0">
               <a:solidFill>
